--- a/03_MOLECULE_Templates/POTX, PPTX/Chart_Style_Gallery.pptx
+++ b/03_MOLECULE_Templates/POTX, PPTX/Chart_Style_Gallery.pptx
@@ -4,15 +4,15 @@
   <p:sldMasterIdLst>
     <p:sldMasterId id="2147483648" r:id="rId1"/>
   </p:sldMasterIdLst>
+  <p:notesMasterIdLst>
+    <p:notesMasterId r:id="rId6"/>
+  </p:notesMasterIdLst>
   <p:sldIdLst>
     <p:sldId id="256" r:id="rId2"/>
     <p:sldId id="257" r:id="rId3"/>
     <p:sldId id="258" r:id="rId4"/>
     <p:sldId id="259" r:id="rId5"/>
   </p:sldIdLst>
-  <p:notesMasterIdLst>
-    <p:notesMasterId r:id="rId6"/>
-  </p:notesMasterIdLst>
   <p:sldSz cx="12192000" cy="6858000"/>
   <p:notesSz cx="6858000" cy="12192000"/>
   <p:defaultTextStyle>
@@ -107,13 +107,158 @@
       </a:defRPr>
     </a:lvl9pPr>
   </p:defaultTextStyle>
+  <p:extLst>
+    <p:ext uri="{EFAFB233-063F-42B5-8137-9DF3F51BA10A}">
+      <p15:sldGuideLst xmlns:p15="http://schemas.microsoft.com/office/powerpoint/2012/main"/>
+    </p:ext>
+  </p:extLst>
 </p:presentation>
 </file>
 
+<file path=ppt/revisionInfo.xml><?xml version="1.0" encoding="utf-8"?>
+<p1510:revInfo xmlns:a="http://schemas.openxmlformats.org/drawingml/2006/main" xmlns:r="http://schemas.openxmlformats.org/officeDocument/2006/relationships" xmlns:p1510="http://schemas.microsoft.com/office/powerpoint/2015/10/main">
+  <p1510:revLst>
+    <p1510:client id="{8B9CFEE8-0B4C-47FC-B621-B5B5C1D0B04F}" v="2" dt="2026-09-11T10:22:38.863"/>
+  </p1510:revLst>
+</p1510:revInfo>
+</file>
+
+<file path=ppt/changesInfos/changesInfo1.xml><?xml version="1.0" encoding="utf-8"?>
+<pc:chgInfo xmlns:a="http://schemas.openxmlformats.org/drawingml/2006/main" xmlns:r="http://schemas.openxmlformats.org/officeDocument/2006/relationships" xmlns:ac="http://schemas.microsoft.com/office/drawing/2013/main/command" xmlns:pc="http://schemas.microsoft.com/office/powerpoint/2013/main/command">
+  <pc:docChgLst>
+    <pc:chgData name="anilyzed.com" userId="aaed2106-48f5-4a15-b1fa-35c21b04e48b" providerId="ADAL" clId="{917F0123-1BC7-4763-AF97-4CAACAACC1AF}"/>
+    <pc:docChg chg="custSel modSld">
+      <pc:chgData name="anilyzed.com" userId="aaed2106-48f5-4a15-b1fa-35c21b04e48b" providerId="ADAL" clId="{917F0123-1BC7-4763-AF97-4CAACAACC1AF}" dt="2026-09-11T10:23:10.456" v="14" actId="22"/>
+      <pc:docMkLst>
+        <pc:docMk/>
+      </pc:docMkLst>
+      <pc:sldChg chg="addSp delSp modSp mod">
+        <pc:chgData name="anilyzed.com" userId="aaed2106-48f5-4a15-b1fa-35c21b04e48b" providerId="ADAL" clId="{917F0123-1BC7-4763-AF97-4CAACAACC1AF}" dt="2026-09-11T10:23:10.456" v="14" actId="22"/>
+        <pc:sldMkLst>
+          <pc:docMk/>
+          <pc:sldMk cId="0" sldId="256"/>
+        </pc:sldMkLst>
+        <pc:spChg chg="del">
+          <ac:chgData name="anilyzed.com" userId="aaed2106-48f5-4a15-b1fa-35c21b04e48b" providerId="ADAL" clId="{917F0123-1BC7-4763-AF97-4CAACAACC1AF}" dt="2026-09-11T10:22:33.073" v="0" actId="478"/>
+          <ac:spMkLst>
+            <pc:docMk/>
+            <pc:sldMk cId="0" sldId="256"/>
+            <ac:spMk id="2" creationId="{00000000-0000-0000-0000-000000000000}"/>
+          </ac:spMkLst>
+        </pc:spChg>
+        <pc:spChg chg="add mod">
+          <ac:chgData name="anilyzed.com" userId="aaed2106-48f5-4a15-b1fa-35c21b04e48b" providerId="ADAL" clId="{917F0123-1BC7-4763-AF97-4CAACAACC1AF}" dt="2026-09-11T10:22:38.863" v="2"/>
+          <ac:spMkLst>
+            <pc:docMk/>
+            <pc:sldMk cId="0" sldId="256"/>
+            <ac:spMk id="6" creationId="{91B24A64-1777-C96E-6516-C6D23D321952}"/>
+          </ac:spMkLst>
+        </pc:spChg>
+        <pc:spChg chg="add mod">
+          <ac:chgData name="anilyzed.com" userId="aaed2106-48f5-4a15-b1fa-35c21b04e48b" providerId="ADAL" clId="{917F0123-1BC7-4763-AF97-4CAACAACC1AF}" dt="2026-09-11T10:22:38.863" v="2"/>
+          <ac:spMkLst>
+            <pc:docMk/>
+            <pc:sldMk cId="0" sldId="256"/>
+            <ac:spMk id="7" creationId="{1153018B-D513-FE71-7854-F20DFD36D2C7}"/>
+          </ac:spMkLst>
+        </pc:spChg>
+        <pc:picChg chg="add">
+          <ac:chgData name="anilyzed.com" userId="aaed2106-48f5-4a15-b1fa-35c21b04e48b" providerId="ADAL" clId="{917F0123-1BC7-4763-AF97-4CAACAACC1AF}" dt="2026-09-11T10:23:10.456" v="14" actId="22"/>
+          <ac:picMkLst>
+            <pc:docMk/>
+            <pc:sldMk cId="0" sldId="256"/>
+            <ac:picMk id="9" creationId="{3FCC1A2E-BC5D-49D3-CE12-4392E710CEEA}"/>
+          </ac:picMkLst>
+        </pc:picChg>
+      </pc:sldChg>
+      <pc:sldChg chg="addSp delSp mod">
+        <pc:chgData name="anilyzed.com" userId="aaed2106-48f5-4a15-b1fa-35c21b04e48b" providerId="ADAL" clId="{917F0123-1BC7-4763-AF97-4CAACAACC1AF}" dt="2026-09-11T10:23:01.939" v="11" actId="22"/>
+        <pc:sldMkLst>
+          <pc:docMk/>
+          <pc:sldMk cId="0" sldId="257"/>
+        </pc:sldMkLst>
+        <pc:spChg chg="del">
+          <ac:chgData name="anilyzed.com" userId="aaed2106-48f5-4a15-b1fa-35c21b04e48b" providerId="ADAL" clId="{917F0123-1BC7-4763-AF97-4CAACAACC1AF}" dt="2026-09-11T10:23:01.523" v="10" actId="478"/>
+          <ac:spMkLst>
+            <pc:docMk/>
+            <pc:sldMk cId="0" sldId="257"/>
+            <ac:spMk id="2" creationId="{00000000-0000-0000-0000-000000000000}"/>
+          </ac:spMkLst>
+        </pc:spChg>
+        <pc:picChg chg="add">
+          <ac:chgData name="anilyzed.com" userId="aaed2106-48f5-4a15-b1fa-35c21b04e48b" providerId="ADAL" clId="{917F0123-1BC7-4763-AF97-4CAACAACC1AF}" dt="2026-09-11T10:23:01.939" v="11" actId="22"/>
+          <ac:picMkLst>
+            <pc:docMk/>
+            <pc:sldMk cId="0" sldId="257"/>
+            <ac:picMk id="7" creationId="{90342AE6-1BDE-DA88-BF41-D8BF598109D9}"/>
+          </ac:picMkLst>
+        </pc:picChg>
+      </pc:sldChg>
+      <pc:sldChg chg="addSp delSp mod">
+        <pc:chgData name="anilyzed.com" userId="aaed2106-48f5-4a15-b1fa-35c21b04e48b" providerId="ADAL" clId="{917F0123-1BC7-4763-AF97-4CAACAACC1AF}" dt="2026-09-11T10:23:04.994" v="13" actId="22"/>
+        <pc:sldMkLst>
+          <pc:docMk/>
+          <pc:sldMk cId="0" sldId="258"/>
+        </pc:sldMkLst>
+        <pc:spChg chg="del">
+          <ac:chgData name="anilyzed.com" userId="aaed2106-48f5-4a15-b1fa-35c21b04e48b" providerId="ADAL" clId="{917F0123-1BC7-4763-AF97-4CAACAACC1AF}" dt="2026-09-11T10:23:04.685" v="12" actId="478"/>
+          <ac:spMkLst>
+            <pc:docMk/>
+            <pc:sldMk cId="0" sldId="258"/>
+            <ac:spMk id="2" creationId="{00000000-0000-0000-0000-000000000000}"/>
+          </ac:spMkLst>
+        </pc:spChg>
+        <pc:picChg chg="add">
+          <ac:chgData name="anilyzed.com" userId="aaed2106-48f5-4a15-b1fa-35c21b04e48b" providerId="ADAL" clId="{917F0123-1BC7-4763-AF97-4CAACAACC1AF}" dt="2026-09-11T10:23:04.994" v="13" actId="22"/>
+          <ac:picMkLst>
+            <pc:docMk/>
+            <pc:sldMk cId="0" sldId="258"/>
+            <ac:picMk id="7" creationId="{0335D21E-AEF1-744A-CEB7-5518FF868DA2}"/>
+          </ac:picMkLst>
+        </pc:picChg>
+      </pc:sldChg>
+      <pc:sldChg chg="addSp delSp modSp mod">
+        <pc:chgData name="anilyzed.com" userId="aaed2106-48f5-4a15-b1fa-35c21b04e48b" providerId="ADAL" clId="{917F0123-1BC7-4763-AF97-4CAACAACC1AF}" dt="2026-09-11T10:22:58.601" v="9" actId="22"/>
+        <pc:sldMkLst>
+          <pc:docMk/>
+          <pc:sldMk cId="0" sldId="259"/>
+        </pc:sldMkLst>
+        <pc:spChg chg="del">
+          <ac:chgData name="anilyzed.com" userId="aaed2106-48f5-4a15-b1fa-35c21b04e48b" providerId="ADAL" clId="{917F0123-1BC7-4763-AF97-4CAACAACC1AF}" dt="2026-09-11T10:22:58.186" v="8" actId="478"/>
+          <ac:spMkLst>
+            <pc:docMk/>
+            <pc:sldMk cId="0" sldId="259"/>
+            <ac:spMk id="2" creationId="{00000000-0000-0000-0000-000000000000}"/>
+          </ac:spMkLst>
+        </pc:spChg>
+        <pc:picChg chg="add del mod">
+          <ac:chgData name="anilyzed.com" userId="aaed2106-48f5-4a15-b1fa-35c21b04e48b" providerId="ADAL" clId="{917F0123-1BC7-4763-AF97-4CAACAACC1AF}" dt="2026-09-11T10:22:56.035" v="7" actId="21"/>
+          <ac:picMkLst>
+            <pc:docMk/>
+            <pc:sldMk cId="0" sldId="259"/>
+            <ac:picMk id="7" creationId="{A4D780C2-1251-F855-D2F7-1BA6AD866BF0}"/>
+          </ac:picMkLst>
+        </pc:picChg>
+        <pc:picChg chg="add">
+          <ac:chgData name="anilyzed.com" userId="aaed2106-48f5-4a15-b1fa-35c21b04e48b" providerId="ADAL" clId="{917F0123-1BC7-4763-AF97-4CAACAACC1AF}" dt="2026-09-11T10:22:58.601" v="9" actId="22"/>
+          <ac:picMkLst>
+            <pc:docMk/>
+            <pc:sldMk cId="0" sldId="259"/>
+            <ac:picMk id="9" creationId="{849DA02F-5767-E3F9-2C1D-10FF2455C2EF}"/>
+          </ac:picMkLst>
+        </pc:picChg>
+      </pc:sldChg>
+    </pc:docChg>
+  </pc:docChgLst>
+</pc:chgInfo>
+</file>
+
 <file path=ppt/charts/chart1.xml><?xml version="1.0" encoding="utf-8"?>
-<c:chartSpace xmlns:c="http://schemas.openxmlformats.org/drawingml/2006/chart" xmlns:a="http://schemas.openxmlformats.org/drawingml/2006/main" xmlns:r="http://schemas.openxmlformats.org/officeDocument/2006/relationships">
+<c:chartSpace xmlns:c="http://schemas.openxmlformats.org/drawingml/2006/chart" xmlns:a="http://schemas.openxmlformats.org/drawingml/2006/main" xmlns:r="http://schemas.openxmlformats.org/officeDocument/2006/relationships" xmlns:c16r2="http://schemas.microsoft.com/office/drawing/2015/06/chart">
   <c:date1904 val="0"/>
+  <c:lang val="en-US"/>
   <c:roundedCorners val="1"/>
+  <c:style val="2"/>
   <c:chart>
     <c:autoTitleDeleted val="1"/>
     <c:plotArea>
@@ -145,18 +290,26 @@
           <c:invertIfNegative val="0"/>
           <c:dLbls>
             <c:numFmt formatCode="#,##0" sourceLinked="0"/>
+            <c:spPr>
+              <a:noFill/>
+              <a:ln>
+                <a:noFill/>
+              </a:ln>
+              <a:effectLst/>
+            </c:spPr>
             <c:txPr>
               <a:bodyPr/>
               <a:lstStyle/>
               <a:p>
                 <a:pPr>
-                  <a:defRPr b="0" i="0" strike="noStrike" sz="1000" u="none">
+                  <a:defRPr sz="1000" b="0" i="0" u="none" strike="noStrike">
                     <a:solidFill>
                       <a:srgbClr val="2E2E2E"/>
                     </a:solidFill>
                     <a:latin typeface="Plus Jakarta Sans"/>
                   </a:defRPr>
                 </a:pPr>
+                <a:endParaRPr lang="en-US"/>
               </a:p>
             </c:txPr>
             <c:showLegendKey val="0"/>
@@ -166,28 +319,31 @@
             <c:showPercent val="0"/>
             <c:showBubbleSize val="0"/>
             <c:showLeaderLines val="0"/>
+            <c:extLst>
+              <c:ext xmlns:c15="http://schemas.microsoft.com/office/drawing/2012/chart" uri="{CE6537A1-D6FC-4f65-9D91-7224C49458BB}">
+                <c15:showLeaderLines val="0"/>
+              </c:ext>
+            </c:extLst>
           </c:dLbls>
           <c:cat>
-            <c:multiLvlStrRef>
+            <c:strRef>
               <c:f>Sheet1!$A$2:$A$5</c:f>
-              <c:multiLvlStrCache>
+              <c:strCache>
                 <c:ptCount val="4"/>
-                <c:lvl>
-                  <c:pt idx="0">
-                    <c:v>Q1</c:v>
-                  </c:pt>
-                  <c:pt idx="1">
-                    <c:v>Q2</c:v>
-                  </c:pt>
-                  <c:pt idx="2">
-                    <c:v>Q3</c:v>
-                  </c:pt>
-                  <c:pt idx="3">
-                    <c:v>Q4</c:v>
-                  </c:pt>
-                </c:lvl>
-              </c:multiLvlStrCache>
-            </c:multiLvlStrRef>
+                <c:pt idx="0">
+                  <c:v>Q1</c:v>
+                </c:pt>
+                <c:pt idx="1">
+                  <c:v>Q2</c:v>
+                </c:pt>
+                <c:pt idx="2">
+                  <c:v>Q3</c:v>
+                </c:pt>
+                <c:pt idx="3">
+                  <c:v>Q4</c:v>
+                </c:pt>
+              </c:strCache>
+            </c:strRef>
           </c:cat>
           <c:val>
             <c:numRef>
@@ -210,6 +366,11 @@
               </c:numCache>
             </c:numRef>
           </c:val>
+          <c:extLst>
+            <c:ext xmlns:c16="http://schemas.microsoft.com/office/drawing/2014/chart" uri="{C3380CC4-5D6E-409C-BE32-E72D297353CC}">
+              <c16:uniqueId val="{00000000-D474-4C26-B340-3C018E4F02E0}"/>
+            </c:ext>
+          </c:extLst>
         </c:ser>
         <c:ser>
           <c:idx val="1"/>
@@ -234,18 +395,26 @@
           <c:invertIfNegative val="0"/>
           <c:dLbls>
             <c:numFmt formatCode="#,##0" sourceLinked="0"/>
+            <c:spPr>
+              <a:noFill/>
+              <a:ln>
+                <a:noFill/>
+              </a:ln>
+              <a:effectLst/>
+            </c:spPr>
             <c:txPr>
               <a:bodyPr/>
               <a:lstStyle/>
               <a:p>
                 <a:pPr>
-                  <a:defRPr b="0" i="0" strike="noStrike" sz="1000" u="none">
+                  <a:defRPr sz="1000" b="0" i="0" u="none" strike="noStrike">
                     <a:solidFill>
                       <a:srgbClr val="2E2E2E"/>
                     </a:solidFill>
                     <a:latin typeface="Plus Jakarta Sans"/>
                   </a:defRPr>
                 </a:pPr>
+                <a:endParaRPr lang="en-US"/>
               </a:p>
             </c:txPr>
             <c:showLegendKey val="0"/>
@@ -255,28 +424,31 @@
             <c:showPercent val="0"/>
             <c:showBubbleSize val="0"/>
             <c:showLeaderLines val="0"/>
+            <c:extLst>
+              <c:ext xmlns:c15="http://schemas.microsoft.com/office/drawing/2012/chart" uri="{CE6537A1-D6FC-4f65-9D91-7224C49458BB}">
+                <c15:showLeaderLines val="0"/>
+              </c:ext>
+            </c:extLst>
           </c:dLbls>
           <c:cat>
-            <c:multiLvlStrRef>
+            <c:strRef>
               <c:f>Sheet1!$A$2:$A$5</c:f>
-              <c:multiLvlStrCache>
+              <c:strCache>
                 <c:ptCount val="4"/>
-                <c:lvl>
-                  <c:pt idx="0">
-                    <c:v>Q1</c:v>
-                  </c:pt>
-                  <c:pt idx="1">
-                    <c:v>Q2</c:v>
-                  </c:pt>
-                  <c:pt idx="2">
-                    <c:v>Q3</c:v>
-                  </c:pt>
-                  <c:pt idx="3">
-                    <c:v>Q4</c:v>
-                  </c:pt>
-                </c:lvl>
-              </c:multiLvlStrCache>
-            </c:multiLvlStrRef>
+                <c:pt idx="0">
+                  <c:v>Q1</c:v>
+                </c:pt>
+                <c:pt idx="1">
+                  <c:v>Q2</c:v>
+                </c:pt>
+                <c:pt idx="2">
+                  <c:v>Q3</c:v>
+                </c:pt>
+                <c:pt idx="3">
+                  <c:v>Q4</c:v>
+                </c:pt>
+              </c:strCache>
+            </c:strRef>
           </c:cat>
           <c:val>
             <c:numRef>
@@ -299,36 +471,23 @@
               </c:numCache>
             </c:numRef>
           </c:val>
+          <c:extLst>
+            <c:ext xmlns:c16="http://schemas.microsoft.com/office/drawing/2014/chart" uri="{C3380CC4-5D6E-409C-BE32-E72D297353CC}">
+              <c16:uniqueId val="{00000001-D474-4C26-B340-3C018E4F02E0}"/>
+            </c:ext>
+          </c:extLst>
         </c:ser>
         <c:dLbls>
-          <c:numFmt formatCode="#,##0" sourceLinked="0"/>
-          <c:txPr>
-            <a:bodyPr/>
-            <a:lstStyle/>
-            <a:p>
-              <a:pPr>
-                <a:defRPr b="0" i="0" strike="noStrike" sz="1000" u="none">
-                  <a:solidFill>
-                    <a:srgbClr val="2E2E2E"/>
-                  </a:solidFill>
-                  <a:latin typeface="Plus Jakarta Sans"/>
-                </a:defRPr>
-              </a:pPr>
-            </a:p>
-          </c:txPr>
           <c:showLegendKey val="0"/>
           <c:showVal val="1"/>
           <c:showCatName val="0"/>
           <c:showSerName val="0"/>
           <c:showPercent val="0"/>
           <c:showBubbleSize val="0"/>
-          <c:showLeaderLines val="0"/>
         </c:dLbls>
         <c:gapWidth val="40"/>
-        <c:overlap val="0"/>
         <c:axId val="2094734554"/>
         <c:axId val="2094734552"/>
-        <c:axId val="2094734556"/>
       </c:barChart>
       <c:catAx>
         <c:axId val="2094734554"/>
@@ -367,6 +526,7 @@
         <c:crosses val="autoZero"/>
         <c:auto val="1"/>
         <c:lblAlgn val="ctr"/>
+        <c:lblOffset val="100"/>
         <c:noMultiLvlLbl val="1"/>
       </c:catAx>
       <c:valAx>
@@ -380,30 +540,6 @@
         <c:majorTickMark val="out"/>
         <c:minorTickMark val="none"/>
         <c:tickLblPos val="nextTo"/>
-        <c:spPr>
-          <a:ln w="12700" cap="flat">
-            <a:solidFill>
-              <a:srgbClr val="888888"/>
-            </a:solidFill>
-            <a:prstDash val="solid"/>
-            <a:round/>
-          </a:ln>
-        </c:spPr>
-        <c:txPr>
-          <a:bodyPr/>
-          <a:lstStyle/>
-          <a:p>
-            <a:pPr>
-              <a:defRPr sz="1200" b="0" i="0" u="none" strike="noStrike">
-                <a:solidFill>
-                  <a:srgbClr val="000000"/>
-                </a:solidFill>
-                <a:latin typeface="Arial"/>
-              </a:defRPr>
-            </a:pPr>
-            <a:endParaRPr lang="en-US"/>
-          </a:p>
-        </c:txPr>
         <c:crossAx val="2094734554"/>
         <c:crosses val="autoZero"/>
         <c:crossBetween val="between"/>
@@ -435,6 +571,7 @@
     </c:legend>
     <c:plotVisOnly val="1"/>
     <c:dispBlanksAs val="span"/>
+    <c:showDLblsOverMax val="1"/>
   </c:chart>
   <c:spPr>
     <a:noFill/>
@@ -450,14 +587,17 @@
 </file>
 
 <file path=ppt/charts/chart2.xml><?xml version="1.0" encoding="utf-8"?>
-<c:chartSpace xmlns:c="http://schemas.openxmlformats.org/drawingml/2006/chart" xmlns:a="http://schemas.openxmlformats.org/drawingml/2006/main" xmlns:r="http://schemas.openxmlformats.org/officeDocument/2006/relationships">
+<c:chartSpace xmlns:c="http://schemas.openxmlformats.org/drawingml/2006/chart" xmlns:a="http://schemas.openxmlformats.org/drawingml/2006/main" xmlns:r="http://schemas.openxmlformats.org/officeDocument/2006/relationships" xmlns:c16r2="http://schemas.microsoft.com/office/drawing/2015/06/chart">
   <c:date1904 val="0"/>
+  <c:lang val="en-US"/>
   <c:roundedCorners val="1"/>
+  <c:style val="2"/>
   <c:chart>
     <c:autoTitleDeleted val="1"/>
     <c:plotArea>
       <c:layout/>
       <c:lineChart>
+        <c:grouping val="standard"/>
         <c:varyColors val="0"/>
         <c:ser>
           <c:idx val="0"/>
@@ -474,9 +614,6 @@
             </c:strRef>
           </c:tx>
           <c:spPr>
-            <a:solidFill>
-              <a:srgbClr val="3B3EA9"/>
-            </a:solidFill>
             <a:ln w="38100" cap="flat">
               <a:solidFill>
                 <a:srgbClr val="3B3EA9"/>
@@ -486,31 +623,6 @@
             </a:ln>
             <a:effectLst/>
           </c:spPr>
-          <c:invertIfNegative val="0"/>
-          <c:dLbls>
-            <c:numFmt formatCode="#,##0" sourceLinked="0"/>
-            <c:txPr>
-              <a:bodyPr/>
-              <a:lstStyle/>
-              <a:p>
-                <a:pPr>
-                  <a:defRPr b="0" i="0" strike="noStrike" sz="1200" u="none">
-                    <a:solidFill>
-                      <a:srgbClr val="000000"/>
-                    </a:solidFill>
-                    <a:latin typeface="Arial"/>
-                  </a:defRPr>
-                </a:pPr>
-              </a:p>
-            </c:txPr>
-            <c:showLegendKey val="0"/>
-            <c:showVal val="0"/>
-            <c:showCatName val="0"/>
-            <c:showSerName val="0"/>
-            <c:showPercent val="0"/>
-            <c:showBubbleSize val="0"/>
-            <c:showLeaderLines val="0"/>
-          </c:dLbls>
           <c:marker>
             <c:symbol val="circle"/>
             <c:size val="7"/>
@@ -529,29 +641,27 @@
             </c:spPr>
           </c:marker>
           <c:cat>
-            <c:multiLvlStrRef>
+            <c:strRef>
               <c:f>Sheet1!$A$2:$A$6</c:f>
-              <c:multiLvlStrCache>
+              <c:strCache>
                 <c:ptCount val="5"/>
-                <c:lvl>
-                  <c:pt idx="0">
-                    <c:v>W1</c:v>
-                  </c:pt>
-                  <c:pt idx="1">
-                    <c:v>W4</c:v>
-                  </c:pt>
-                  <c:pt idx="2">
-                    <c:v>W8</c:v>
-                  </c:pt>
-                  <c:pt idx="3">
-                    <c:v>W12</c:v>
-                  </c:pt>
-                  <c:pt idx="4">
-                    <c:v>W16</c:v>
-                  </c:pt>
-                </c:lvl>
-              </c:multiLvlStrCache>
-            </c:multiLvlStrRef>
+                <c:pt idx="0">
+                  <c:v>W1</c:v>
+                </c:pt>
+                <c:pt idx="1">
+                  <c:v>W4</c:v>
+                </c:pt>
+                <c:pt idx="2">
+                  <c:v>W8</c:v>
+                </c:pt>
+                <c:pt idx="3">
+                  <c:v>W12</c:v>
+                </c:pt>
+                <c:pt idx="4">
+                  <c:v>W16</c:v>
+                </c:pt>
+              </c:strCache>
+            </c:strRef>
           </c:cat>
           <c:val>
             <c:numRef>
@@ -578,35 +688,24 @@
             </c:numRef>
           </c:val>
           <c:smooth val="0"/>
+          <c:extLst>
+            <c:ext xmlns:c16="http://schemas.microsoft.com/office/drawing/2014/chart" uri="{C3380CC4-5D6E-409C-BE32-E72D297353CC}">
+              <c16:uniqueId val="{00000000-9D2C-4E9A-967A-A0BCB0AD1BF0}"/>
+            </c:ext>
+          </c:extLst>
         </c:ser>
         <c:dLbls>
-          <c:numFmt formatCode="#,##0" sourceLinked="0"/>
-          <c:txPr>
-            <a:bodyPr/>
-            <a:lstStyle/>
-            <a:p>
-              <a:pPr>
-                <a:defRPr b="0" i="0" strike="noStrike" sz="1200" u="none">
-                  <a:solidFill>
-                    <a:srgbClr val="000000"/>
-                  </a:solidFill>
-                  <a:latin typeface="Arial"/>
-                </a:defRPr>
-              </a:pPr>
-            </a:p>
-          </c:txPr>
           <c:showLegendKey val="0"/>
           <c:showVal val="0"/>
           <c:showCatName val="0"/>
           <c:showSerName val="0"/>
           <c:showPercent val="0"/>
           <c:showBubbleSize val="0"/>
-          <c:showLeaderLines val="0"/>
         </c:dLbls>
         <c:marker val="1"/>
+        <c:smooth val="0"/>
         <c:axId val="2094734554"/>
         <c:axId val="2094734552"/>
-        <c:axId val="2094734556"/>
       </c:lineChart>
       <c:catAx>
         <c:axId val="2094734554"/>
@@ -645,6 +744,7 @@
         <c:crosses val="autoZero"/>
         <c:auto val="1"/>
         <c:lblAlgn val="ctr"/>
+        <c:lblOffset val="100"/>
         <c:noMultiLvlLbl val="1"/>
       </c:catAx>
       <c:valAx>
@@ -707,6 +807,7 @@
     </c:plotArea>
     <c:plotVisOnly val="1"/>
     <c:dispBlanksAs val="span"/>
+    <c:showDLblsOverMax val="1"/>
   </c:chart>
   <c:spPr>
     <a:noFill/>
@@ -722,9 +823,11 @@
 </file>
 
 <file path=ppt/charts/chart3.xml><?xml version="1.0" encoding="utf-8"?>
-<c:chartSpace xmlns:c="http://schemas.openxmlformats.org/drawingml/2006/chart" xmlns:a="http://schemas.openxmlformats.org/drawingml/2006/main" xmlns:r="http://schemas.openxmlformats.org/officeDocument/2006/relationships">
+<c:chartSpace xmlns:c="http://schemas.openxmlformats.org/drawingml/2006/chart" xmlns:a="http://schemas.openxmlformats.org/drawingml/2006/main" xmlns:r="http://schemas.openxmlformats.org/officeDocument/2006/relationships" xmlns:c16r2="http://schemas.microsoft.com/office/drawing/2015/06/chart">
   <c:date1904 val="0"/>
+  <c:lang val="en-US"/>
   <c:roundedCorners val="1"/>
+  <c:style val="2"/>
   <c:chart>
     <c:autoTitleDeleted val="1"/>
     <c:plotArea>
@@ -767,6 +870,11 @@
               </a:solidFill>
               <a:effectLst/>
             </c:spPr>
+            <c:extLst>
+              <c:ext xmlns:c16="http://schemas.microsoft.com/office/drawing/2014/chart" uri="{C3380CC4-5D6E-409C-BE32-E72D297353CC}">
+                <c16:uniqueId val="{00000001-9B0A-4CF9-A80F-BF5956FF2CFF}"/>
+              </c:ext>
+            </c:extLst>
           </c:dPt>
           <c:dPt>
             <c:idx val="1"/>
@@ -777,6 +885,11 @@
               </a:solidFill>
               <a:effectLst/>
             </c:spPr>
+            <c:extLst>
+              <c:ext xmlns:c16="http://schemas.microsoft.com/office/drawing/2014/chart" uri="{C3380CC4-5D6E-409C-BE32-E72D297353CC}">
+                <c16:uniqueId val="{00000003-9B0A-4CF9-A80F-BF5956FF2CFF}"/>
+              </c:ext>
+            </c:extLst>
           </c:dPt>
           <c:dPt>
             <c:idx val="2"/>
@@ -787,6 +900,11 @@
               </a:solidFill>
               <a:effectLst/>
             </c:spPr>
+            <c:extLst>
+              <c:ext xmlns:c16="http://schemas.microsoft.com/office/drawing/2014/chart" uri="{C3380CC4-5D6E-409C-BE32-E72D297353CC}">
+                <c16:uniqueId val="{00000005-9B0A-4CF9-A80F-BF5956FF2CFF}"/>
+              </c:ext>
+            </c:extLst>
           </c:dPt>
           <c:dLbls>
             <c:dLbl>
@@ -805,6 +923,7 @@
                       <a:latin typeface="Plus Jakarta Sans"/>
                     </a:defRPr>
                   </a:pPr>
+                  <a:endParaRPr lang="en-US"/>
                 </a:p>
               </c:txPr>
               <c:showLegendKey val="0"/>
@@ -813,6 +932,12 @@
               <c:showSerName val="0"/>
               <c:showPercent val="0"/>
               <c:showBubbleSize val="0"/>
+              <c:extLst>
+                <c:ext xmlns:c15="http://schemas.microsoft.com/office/drawing/2012/chart" uri="{CE6537A1-D6FC-4f65-9D91-7224C49458BB}"/>
+                <c:ext xmlns:c16="http://schemas.microsoft.com/office/drawing/2014/chart" uri="{C3380CC4-5D6E-409C-BE32-E72D297353CC}">
+                  <c16:uniqueId val="{00000001-9B0A-4CF9-A80F-BF5956FF2CFF}"/>
+                </c:ext>
+              </c:extLst>
             </c:dLbl>
             <c:dLbl>
               <c:idx val="1"/>
@@ -830,6 +955,7 @@
                       <a:latin typeface="Plus Jakarta Sans"/>
                     </a:defRPr>
                   </a:pPr>
+                  <a:endParaRPr lang="en-US"/>
                 </a:p>
               </c:txPr>
               <c:showLegendKey val="0"/>
@@ -838,6 +964,12 @@
               <c:showSerName val="0"/>
               <c:showPercent val="0"/>
               <c:showBubbleSize val="0"/>
+              <c:extLst>
+                <c:ext xmlns:c15="http://schemas.microsoft.com/office/drawing/2012/chart" uri="{CE6537A1-D6FC-4f65-9D91-7224C49458BB}"/>
+                <c:ext xmlns:c16="http://schemas.microsoft.com/office/drawing/2014/chart" uri="{C3380CC4-5D6E-409C-BE32-E72D297353CC}">
+                  <c16:uniqueId val="{00000003-9B0A-4CF9-A80F-BF5956FF2CFF}"/>
+                </c:ext>
+              </c:extLst>
             </c:dLbl>
             <c:dLbl>
               <c:idx val="2"/>
@@ -855,6 +987,7 @@
                       <a:latin typeface="Plus Jakarta Sans"/>
                     </a:defRPr>
                   </a:pPr>
+                  <a:endParaRPr lang="en-US"/>
                 </a:p>
               </c:txPr>
               <c:showLegendKey val="0"/>
@@ -863,8 +996,21 @@
               <c:showSerName val="0"/>
               <c:showPercent val="0"/>
               <c:showBubbleSize val="0"/>
+              <c:extLst>
+                <c:ext xmlns:c15="http://schemas.microsoft.com/office/drawing/2012/chart" uri="{CE6537A1-D6FC-4f65-9D91-7224C49458BB}"/>
+                <c:ext xmlns:c16="http://schemas.microsoft.com/office/drawing/2014/chart" uri="{C3380CC4-5D6E-409C-BE32-E72D297353CC}">
+                  <c16:uniqueId val="{00000005-9B0A-4CF9-A80F-BF5956FF2CFF}"/>
+                </c:ext>
+              </c:extLst>
             </c:dLbl>
             <c:numFmt formatCode="General" sourceLinked="0"/>
+            <c:spPr>
+              <a:noFill/>
+              <a:ln>
+                <a:noFill/>
+              </a:ln>
+              <a:effectLst/>
+            </c:spPr>
             <c:txPr>
               <a:bodyPr/>
               <a:lstStyle/>
@@ -877,6 +1023,7 @@
                     <a:latin typeface="Arial"/>
                   </a:defRPr>
                 </a:pPr>
+                <a:endParaRPr lang="en-US"/>
               </a:p>
             </c:txPr>
             <c:showLegendKey val="0"/>
@@ -886,6 +1033,9 @@
             <c:showPercent val="1"/>
             <c:showBubbleSize val="0"/>
             <c:showLeaderLines val="0"/>
+            <c:extLst>
+              <c:ext xmlns:c15="http://schemas.microsoft.com/office/drawing/2012/chart" uri="{CE6537A1-D6FC-4f65-9D91-7224C49458BB}"/>
+            </c:extLst>
           </c:dLbls>
           <c:cat>
             <c:strRef>
@@ -908,6 +1058,7 @@
             <c:numRef>
               <c:f>Sheet1!$B$2:$B$4</c:f>
               <c:numCache>
+                <c:formatCode>General</c:formatCode>
                 <c:ptCount val="3"/>
                 <c:pt idx="0">
                   <c:v>58</c:v>
@@ -921,7 +1072,21 @@
               </c:numCache>
             </c:numRef>
           </c:val>
+          <c:extLst>
+            <c:ext xmlns:c16="http://schemas.microsoft.com/office/drawing/2014/chart" uri="{C3380CC4-5D6E-409C-BE32-E72D297353CC}">
+              <c16:uniqueId val="{00000006-9B0A-4CF9-A80F-BF5956FF2CFF}"/>
+            </c:ext>
+          </c:extLst>
         </c:ser>
+        <c:dLbls>
+          <c:showLegendKey val="0"/>
+          <c:showVal val="0"/>
+          <c:showCatName val="0"/>
+          <c:showSerName val="0"/>
+          <c:showPercent val="0"/>
+          <c:showBubbleSize val="0"/>
+          <c:showLeaderLines val="0"/>
+        </c:dLbls>
         <c:firstSliceAng val="0"/>
         <c:holeSize val="60"/>
       </c:doughnutChart>
@@ -952,6 +1117,7 @@
     </c:legend>
     <c:plotVisOnly val="1"/>
     <c:dispBlanksAs val="span"/>
+    <c:showDLblsOverMax val="1"/>
   </c:chart>
   <c:spPr>
     <a:noFill/>
@@ -967,9 +1133,11 @@
 </file>
 
 <file path=ppt/charts/chart4.xml><?xml version="1.0" encoding="utf-8"?>
-<c:chartSpace xmlns:c="http://schemas.openxmlformats.org/drawingml/2006/chart" xmlns:a="http://schemas.openxmlformats.org/drawingml/2006/main" xmlns:r="http://schemas.openxmlformats.org/officeDocument/2006/relationships">
+<c:chartSpace xmlns:c="http://schemas.openxmlformats.org/drawingml/2006/chart" xmlns:a="http://schemas.openxmlformats.org/drawingml/2006/main" xmlns:r="http://schemas.openxmlformats.org/officeDocument/2006/relationships" xmlns:c16r2="http://schemas.microsoft.com/office/drawing/2015/06/chart">
   <c:date1904 val="0"/>
+  <c:lang val="en-US"/>
   <c:roundedCorners val="1"/>
+  <c:style val="2"/>
   <c:chart>
     <c:autoTitleDeleted val="1"/>
     <c:plotArea>
@@ -1001,18 +1169,26 @@
           <c:invertIfNegative val="0"/>
           <c:dLbls>
             <c:numFmt formatCode="#,##0" sourceLinked="0"/>
+            <c:spPr>
+              <a:noFill/>
+              <a:ln>
+                <a:noFill/>
+              </a:ln>
+              <a:effectLst/>
+            </c:spPr>
             <c:txPr>
               <a:bodyPr/>
               <a:lstStyle/>
               <a:p>
                 <a:pPr>
-                  <a:defRPr b="0" i="0" strike="noStrike" sz="1000" u="none">
+                  <a:defRPr sz="1000" b="0" i="0" u="none" strike="noStrike">
                     <a:solidFill>
                       <a:srgbClr val="2E2E2E"/>
                     </a:solidFill>
                     <a:latin typeface="Plus Jakarta Sans"/>
                   </a:defRPr>
                 </a:pPr>
+                <a:endParaRPr lang="en-US"/>
               </a:p>
             </c:txPr>
             <c:showLegendKey val="0"/>
@@ -1022,31 +1198,34 @@
             <c:showPercent val="0"/>
             <c:showBubbleSize val="0"/>
             <c:showLeaderLines val="0"/>
+            <c:extLst>
+              <c:ext xmlns:c15="http://schemas.microsoft.com/office/drawing/2012/chart" uri="{CE6537A1-D6FC-4f65-9D91-7224C49458BB}">
+                <c15:showLeaderLines val="0"/>
+              </c:ext>
+            </c:extLst>
           </c:dLbls>
           <c:cat>
-            <c:multiLvlStrRef>
+            <c:strRef>
               <c:f>Sheet1!$A$2:$A$6</c:f>
-              <c:multiLvlStrCache>
+              <c:strCache>
                 <c:ptCount val="5"/>
-                <c:lvl>
-                  <c:pt idx="0">
-                    <c:v>Start</c:v>
-                  </c:pt>
-                  <c:pt idx="1">
-                    <c:v>Savings</c:v>
-                  </c:pt>
-                  <c:pt idx="2">
-                    <c:v>New cost</c:v>
-                  </c:pt>
-                  <c:pt idx="3">
-                    <c:v>Efficiency</c:v>
-                  </c:pt>
-                  <c:pt idx="4">
-                    <c:v>End</c:v>
-                  </c:pt>
-                </c:lvl>
-              </c:multiLvlStrCache>
-            </c:multiLvlStrRef>
+                <c:pt idx="0">
+                  <c:v>Start</c:v>
+                </c:pt>
+                <c:pt idx="1">
+                  <c:v>Savings</c:v>
+                </c:pt>
+                <c:pt idx="2">
+                  <c:v>New cost</c:v>
+                </c:pt>
+                <c:pt idx="3">
+                  <c:v>Efficiency</c:v>
+                </c:pt>
+                <c:pt idx="4">
+                  <c:v>End</c:v>
+                </c:pt>
+              </c:strCache>
+            </c:strRef>
           </c:cat>
           <c:val>
             <c:numRef>
@@ -1072,6 +1251,11 @@
               </c:numCache>
             </c:numRef>
           </c:val>
+          <c:extLst>
+            <c:ext xmlns:c16="http://schemas.microsoft.com/office/drawing/2014/chart" uri="{C3380CC4-5D6E-409C-BE32-E72D297353CC}">
+              <c16:uniqueId val="{00000000-E13C-45BE-9651-EF9F757785F3}"/>
+            </c:ext>
+          </c:extLst>
         </c:ser>
         <c:ser>
           <c:idx val="1"/>
@@ -1096,18 +1280,26 @@
           <c:invertIfNegative val="0"/>
           <c:dLbls>
             <c:numFmt formatCode="#,##0" sourceLinked="0"/>
+            <c:spPr>
+              <a:noFill/>
+              <a:ln>
+                <a:noFill/>
+              </a:ln>
+              <a:effectLst/>
+            </c:spPr>
             <c:txPr>
               <a:bodyPr/>
               <a:lstStyle/>
               <a:p>
                 <a:pPr>
-                  <a:defRPr b="0" i="0" strike="noStrike" sz="1000" u="none">
+                  <a:defRPr sz="1000" b="0" i="0" u="none" strike="noStrike">
                     <a:solidFill>
                       <a:srgbClr val="2E2E2E"/>
                     </a:solidFill>
                     <a:latin typeface="Plus Jakarta Sans"/>
                   </a:defRPr>
                 </a:pPr>
+                <a:endParaRPr lang="en-US"/>
               </a:p>
             </c:txPr>
             <c:showLegendKey val="0"/>
@@ -1117,31 +1309,34 @@
             <c:showPercent val="0"/>
             <c:showBubbleSize val="0"/>
             <c:showLeaderLines val="0"/>
+            <c:extLst>
+              <c:ext xmlns:c15="http://schemas.microsoft.com/office/drawing/2012/chart" uri="{CE6537A1-D6FC-4f65-9D91-7224C49458BB}">
+                <c15:showLeaderLines val="0"/>
+              </c:ext>
+            </c:extLst>
           </c:dLbls>
           <c:cat>
-            <c:multiLvlStrRef>
+            <c:strRef>
               <c:f>Sheet1!$A$2:$A$6</c:f>
-              <c:multiLvlStrCache>
+              <c:strCache>
                 <c:ptCount val="5"/>
-                <c:lvl>
-                  <c:pt idx="0">
-                    <c:v>Start</c:v>
-                  </c:pt>
-                  <c:pt idx="1">
-                    <c:v>Savings</c:v>
-                  </c:pt>
-                  <c:pt idx="2">
-                    <c:v>New cost</c:v>
-                  </c:pt>
-                  <c:pt idx="3">
-                    <c:v>Efficiency</c:v>
-                  </c:pt>
-                  <c:pt idx="4">
-                    <c:v>End</c:v>
-                  </c:pt>
-                </c:lvl>
-              </c:multiLvlStrCache>
-            </c:multiLvlStrRef>
+                <c:pt idx="0">
+                  <c:v>Start</c:v>
+                </c:pt>
+                <c:pt idx="1">
+                  <c:v>Savings</c:v>
+                </c:pt>
+                <c:pt idx="2">
+                  <c:v>New cost</c:v>
+                </c:pt>
+                <c:pt idx="3">
+                  <c:v>Efficiency</c:v>
+                </c:pt>
+                <c:pt idx="4">
+                  <c:v>End</c:v>
+                </c:pt>
+              </c:strCache>
+            </c:strRef>
           </c:cat>
           <c:val>
             <c:numRef>
@@ -1167,36 +1362,24 @@
               </c:numCache>
             </c:numRef>
           </c:val>
+          <c:extLst>
+            <c:ext xmlns:c16="http://schemas.microsoft.com/office/drawing/2014/chart" uri="{C3380CC4-5D6E-409C-BE32-E72D297353CC}">
+              <c16:uniqueId val="{00000001-E13C-45BE-9651-EF9F757785F3}"/>
+            </c:ext>
+          </c:extLst>
         </c:ser>
         <c:dLbls>
-          <c:numFmt formatCode="#,##0" sourceLinked="0"/>
-          <c:txPr>
-            <a:bodyPr/>
-            <a:lstStyle/>
-            <a:p>
-              <a:pPr>
-                <a:defRPr b="0" i="0" strike="noStrike" sz="1000" u="none">
-                  <a:solidFill>
-                    <a:srgbClr val="2E2E2E"/>
-                  </a:solidFill>
-                  <a:latin typeface="Plus Jakarta Sans"/>
-                </a:defRPr>
-              </a:pPr>
-            </a:p>
-          </c:txPr>
           <c:showLegendKey val="0"/>
           <c:showVal val="1"/>
           <c:showCatName val="0"/>
           <c:showSerName val="0"/>
           <c:showPercent val="0"/>
           <c:showBubbleSize val="0"/>
-          <c:showLeaderLines val="0"/>
         </c:dLbls>
         <c:gapWidth val="30"/>
         <c:overlap val="100"/>
         <c:axId val="2094734554"/>
         <c:axId val="2094734552"/>
-        <c:axId val="2094734556"/>
       </c:barChart>
       <c:catAx>
         <c:axId val="2094734554"/>
@@ -1235,6 +1418,7 @@
         <c:crosses val="autoZero"/>
         <c:auto val="1"/>
         <c:lblAlgn val="ctr"/>
+        <c:lblOffset val="100"/>
         <c:noMultiLvlLbl val="1"/>
       </c:catAx>
       <c:valAx>
@@ -1248,30 +1432,6 @@
         <c:majorTickMark val="out"/>
         <c:minorTickMark val="none"/>
         <c:tickLblPos val="nextTo"/>
-        <c:spPr>
-          <a:ln w="12700" cap="flat">
-            <a:solidFill>
-              <a:srgbClr val="888888"/>
-            </a:solidFill>
-            <a:prstDash val="solid"/>
-            <a:round/>
-          </a:ln>
-        </c:spPr>
-        <c:txPr>
-          <a:bodyPr/>
-          <a:lstStyle/>
-          <a:p>
-            <a:pPr>
-              <a:defRPr sz="1200" b="0" i="0" u="none" strike="noStrike">
-                <a:solidFill>
-                  <a:srgbClr val="000000"/>
-                </a:solidFill>
-                <a:latin typeface="Arial"/>
-              </a:defRPr>
-            </a:pPr>
-            <a:endParaRPr lang="en-US"/>
-          </a:p>
-        </c:txPr>
         <c:crossAx val="2094734554"/>
         <c:crosses val="autoZero"/>
         <c:crossBetween val="between"/>
@@ -1286,6 +1446,7 @@
     </c:plotArea>
     <c:plotVisOnly val="1"/>
     <c:dispBlanksAs val="span"/>
+    <c:showDLblsOverMax val="1"/>
   </c:chart>
   <c:spPr>
     <a:noFill/>
@@ -1322,234 +1483,10 @@
           <a:chExt cx="0" cy="0"/>
         </a:xfrm>
       </p:grpSpPr>
-      <p:sp>
-        <p:nvSpPr>
-          <p:cNvPr id="2" name="Header Placeholder 1"/>
-          <p:cNvSpPr>
-            <a:spLocks noGrp="1"/>
-          </p:cNvSpPr>
-          <p:nvPr>
-            <p:ph type="hdr" sz="quarter"/>
-          </p:nvPr>
-        </p:nvSpPr>
-        <p:spPr>
-          <a:xfrm>
-            <a:off x="0" y="0"/>
-            <a:ext cx="2971800" cy="458788"/>
-          </a:xfrm>
-          <a:prstGeom prst="rect">
-            <a:avLst/>
-          </a:prstGeom>
-        </p:spPr>
-        <p:txBody>
-          <a:bodyPr vert="horz" lIns="91440" tIns="45720" rIns="91440" bIns="45720" rtlCol="0"/>
-          <a:lstStyle>
-            <a:lvl1pPr algn="l">
-              <a:defRPr sz="1200"/>
-            </a:lvl1pPr>
-          </a:lstStyle>
-          <a:p>
-            <a:endParaRPr lang="en-US"/>
-          </a:p>
-        </p:txBody>
-      </p:sp>
-      <p:sp>
-        <p:nvSpPr>
-          <p:cNvPr id="3" name="Date Placeholder 2"/>
-          <p:cNvSpPr>
-            <a:spLocks noGrp="1"/>
-          </p:cNvSpPr>
-          <p:nvPr>
-            <p:ph type="dt" idx="1"/>
-          </p:nvPr>
-        </p:nvSpPr>
-        <p:spPr>
-          <a:xfrm>
-            <a:off x="3884613" y="0"/>
-            <a:ext cx="2971800" cy="458788"/>
-          </a:xfrm>
-          <a:prstGeom prst="rect">
-            <a:avLst/>
-          </a:prstGeom>
-        </p:spPr>
-        <p:txBody>
-          <a:bodyPr vert="horz" lIns="91440" tIns="45720" rIns="91440" bIns="45720" rtlCol="0"/>
-          <a:lstStyle>
-            <a:lvl1pPr algn="r">
-              <a:defRPr sz="1200"/>
-            </a:lvl1pPr>
-          </a:lstStyle>
-          <a:p>
-            <a:fld id="{5282F153-3F37-0F45-9E97-73ACFA13230C}" type="datetimeFigureOut">
-              <a:rPr lang="en-US"/>
-              <a:t>7/23/19</a:t>
-            </a:fld>
-            <a:endParaRPr lang="en-US"/>
-          </a:p>
-        </p:txBody>
-      </p:sp>
-      <p:sp>
-        <p:nvSpPr>
-          <p:cNvPr id="4" name="Slide Image Placeholder 3"/>
-          <p:cNvSpPr>
-            <a:spLocks noGrp="1" noRot="1" noChangeAspect="1"/>
-          </p:cNvSpPr>
-          <p:nvPr>
-            <p:ph type="sldImg" idx="2"/>
-          </p:nvPr>
-        </p:nvSpPr>
-        <p:spPr>
-          <a:xfrm>
-            <a:off x="685800" y="1143000"/>
-            <a:ext cx="5486400" cy="3086100"/>
-          </a:xfrm>
-          <a:prstGeom prst="rect">
-            <a:avLst/>
-          </a:prstGeom>
-          <a:noFill/>
-          <a:ln w="12700">
-            <a:solidFill>
-              <a:prstClr val="black"/>
-            </a:solidFill>
-          </a:ln>
-        </p:spPr>
-        <p:txBody>
-          <a:bodyPr vert="horz" lIns="91440" tIns="45720" rIns="91440" bIns="45720" rtlCol="0" anchor="ctr"/>
-          <a:lstStyle/>
-          <a:p>
-            <a:endParaRPr lang="en-US"/>
-          </a:p>
-        </p:txBody>
-      </p:sp>
-      <p:sp>
-        <p:nvSpPr>
-          <p:cNvPr id="5" name="Notes Placeholder 4"/>
-          <p:cNvSpPr>
-            <a:spLocks noGrp="1"/>
-          </p:cNvSpPr>
-          <p:nvPr>
-            <p:ph type="body" sz="quarter" idx="3"/>
-          </p:nvPr>
-        </p:nvSpPr>
-        <p:spPr>
-          <a:xfrm>
-            <a:off x="685800" y="4400550"/>
-            <a:ext cx="5486400" cy="3600450"/>
-          </a:xfrm>
-          <a:prstGeom prst="rect">
-            <a:avLst/>
-          </a:prstGeom>
-        </p:spPr>
-        <p:txBody>
-          <a:bodyPr vert="horz" lIns="91440" tIns="45720" rIns="91440" bIns="45720" rtlCol="0"/>
-          <a:lstStyle/>
-          <a:p>
-            <a:pPr lvl="0"/>
-            <a:r>
-              <a:rPr lang="en-US"/>
-              <a:t>Click to edit Master text styles</a:t>
-            </a:r>
-          </a:p>
-          <a:p>
-            <a:pPr lvl="1"/>
-            <a:r>
-              <a:rPr lang="en-US"/>
-              <a:t>Second level</a:t>
-            </a:r>
-          </a:p>
-          <a:p>
-            <a:pPr lvl="2"/>
-            <a:r>
-              <a:rPr lang="en-US"/>
-              <a:t>Third level</a:t>
-            </a:r>
-          </a:p>
-          <a:p>
-            <a:pPr lvl="3"/>
-            <a:r>
-              <a:rPr lang="en-US"/>
-              <a:t>Fourth level</a:t>
-            </a:r>
-          </a:p>
-          <a:p>
-            <a:pPr lvl="4"/>
-            <a:r>
-              <a:rPr lang="en-US"/>
-              <a:t>Fifth level</a:t>
-            </a:r>
-          </a:p>
-        </p:txBody>
-      </p:sp>
-      <p:sp>
-        <p:nvSpPr>
-          <p:cNvPr id="6" name="Footer Placeholder 5"/>
-          <p:cNvSpPr>
-            <a:spLocks noGrp="1"/>
-          </p:cNvSpPr>
-          <p:nvPr>
-            <p:ph type="ftr" sz="quarter" idx="4"/>
-          </p:nvPr>
-        </p:nvSpPr>
-        <p:spPr>
-          <a:xfrm>
-            <a:off x="0" y="8685213"/>
-            <a:ext cx="2971800" cy="458787"/>
-          </a:xfrm>
-          <a:prstGeom prst="rect">
-            <a:avLst/>
-          </a:prstGeom>
-        </p:spPr>
-        <p:txBody>
-          <a:bodyPr vert="horz" lIns="91440" tIns="45720" rIns="91440" bIns="45720" rtlCol="0" anchor="b"/>
-          <a:lstStyle>
-            <a:lvl1pPr algn="l">
-              <a:defRPr sz="1200"/>
-            </a:lvl1pPr>
-          </a:lstStyle>
-          <a:p>
-            <a:endParaRPr lang="en-US"/>
-          </a:p>
-        </p:txBody>
-      </p:sp>
-      <p:sp>
-        <p:nvSpPr>
-          <p:cNvPr id="7" name="Slide Number Placeholder 6"/>
-          <p:cNvSpPr>
-            <a:spLocks noGrp="1"/>
-          </p:cNvSpPr>
-          <p:nvPr>
-            <p:ph type="sldNum" sz="quarter" idx="5"/>
-          </p:nvPr>
-        </p:nvSpPr>
-        <p:spPr>
-          <a:xfrm>
-            <a:off x="3884613" y="8685213"/>
-            <a:ext cx="2971800" cy="458787"/>
-          </a:xfrm>
-          <a:prstGeom prst="rect">
-            <a:avLst/>
-          </a:prstGeom>
-        </p:spPr>
-        <p:txBody>
-          <a:bodyPr vert="horz" lIns="91440" tIns="45720" rIns="91440" bIns="45720" rtlCol="0" anchor="b"/>
-          <a:lstStyle>
-            <a:lvl1pPr algn="r">
-              <a:defRPr sz="1200"/>
-            </a:lvl1pPr>
-          </a:lstStyle>
-          <a:p>
-            <a:fld id="{CE5E9CC1-C706-0F49-92D6-E571CC5EEA8F}" type="slidenum">
-              <a:rPr lang="en-US"/>
-              <a:t>‹#›</a:t>
-            </a:fld>
-            <a:endParaRPr lang="en-US"/>
-          </a:p>
-        </p:txBody>
-      </p:sp>
     </p:spTree>
     <p:extLst>
       <p:ext uri="{BB962C8B-B14F-4D97-AF65-F5344CB8AC3E}">
-        <p14:creationId xmlns:p14="http://schemas.microsoft.com/office/powerpoint/2010/main" val="1024086991"/>
+        <p14:creationId xmlns:p14="http://schemas.microsoft.com/office/powerpoint/2010/main" val="148496547"/>
       </p:ext>
     </p:extLst>
   </p:cSld>
@@ -1693,10 +1630,6 @@
           <a:bodyPr/>
           <a:lstStyle/>
           <a:p>
-            <a:r>
-              <a:rPr lang="en-US" dirty="0"/>
-              <a:t/>
-            </a:r>
             <a:endParaRPr lang="en-US" dirty="0"/>
           </a:p>
         </p:txBody>
@@ -1781,10 +1714,6 @@
           <a:bodyPr/>
           <a:lstStyle/>
           <a:p>
-            <a:r>
-              <a:rPr lang="en-US" dirty="0"/>
-              <a:t/>
-            </a:r>
             <a:endParaRPr lang="en-US" dirty="0"/>
           </a:p>
         </p:txBody>
@@ -1869,10 +1798,6 @@
           <a:bodyPr/>
           <a:lstStyle/>
           <a:p>
-            <a:r>
-              <a:rPr lang="en-US" dirty="0"/>
-              <a:t/>
-            </a:r>
             <a:endParaRPr lang="en-US" dirty="0"/>
           </a:p>
         </p:txBody>
@@ -1957,10 +1882,6 @@
           <a:bodyPr/>
           <a:lstStyle/>
           <a:p>
-            <a:r>
-              <a:rPr lang="en-US" dirty="0"/>
-              <a:t/>
-            </a:r>
             <a:endParaRPr lang="en-US" dirty="0"/>
           </a:p>
         </p:txBody>
@@ -2034,6 +1955,11 @@
 <file path=ppt/slideMasters/slideMaster1.xml><?xml version="1.0" encoding="utf-8"?>
 <p:sldMaster xmlns:a="http://schemas.openxmlformats.org/drawingml/2006/main" xmlns:r="http://schemas.openxmlformats.org/officeDocument/2006/relationships" xmlns:p="http://schemas.openxmlformats.org/presentationml/2006/main">
   <p:cSld>
+    <p:bg>
+      <p:bgRef idx="1001">
+        <a:schemeClr val="bg1"/>
+      </p:bgRef>
+    </p:bg>
     <p:spTree>
       <p:nvGrpSpPr>
         <p:cNvPr id="1" name=""/>
@@ -2327,59 +2253,6 @@
       </p:grpSpPr>
       <p:sp>
         <p:nvSpPr>
-          <p:cNvPr id="2" name="Text 0"/>
-          <p:cNvSpPr/>
-          <p:nvPr/>
-        </p:nvSpPr>
-        <p:spPr>
-          <a:xfrm>
-            <a:off x="457200" y="320040"/>
-            <a:ext cx="1828800" cy="320040"/>
-          </a:xfrm>
-          <a:prstGeom prst="rect">
-            <a:avLst/>
-          </a:prstGeom>
-          <a:noFill/>
-          <a:ln/>
-        </p:spPr>
-        <p:txBody>
-          <a:bodyPr wrap="square" rtlCol="0" anchor="ctr"/>
-          <a:lstStyle/>
-          <a:p>
-            <a:pPr indent="0" marL="0">
-              <a:buNone/>
-            </a:pPr>
-            <a:r>
-              <a:rPr lang="en-US" sz="1400" b="1" dirty="0">
-                <a:solidFill>
-                  <a:srgbClr val="FF4D1C"/>
-                </a:solidFill>
-                <a:latin typeface="Space Grotesk" pitchFamily="34" charset="0"/>
-                <a:ea typeface="Space Grotesk" pitchFamily="34" charset="-122"/>
-                <a:cs typeface="Space Grotesk" pitchFamily="34" charset="-120"/>
-              </a:rPr>
-              <a:t>a</a:t>
-            </a:r>
-            <a:pPr indent="0" marL="0">
-              <a:buNone/>
-            </a:pPr>
-            <a:r>
-              <a:rPr lang="en-US" sz="1400" b="1" dirty="0">
-                <a:solidFill>
-                  <a:srgbClr val="3B3EA9"/>
-                </a:solidFill>
-                <a:latin typeface="Space Grotesk" pitchFamily="34" charset="0"/>
-                <a:ea typeface="Space Grotesk" pitchFamily="34" charset="-122"/>
-                <a:cs typeface="Space Grotesk" pitchFamily="34" charset="-120"/>
-              </a:rPr>
-              <a:t>riviti</a:t>
-            </a:r>
-            <a:endParaRPr lang="en-US" sz="1400" dirty="0"/>
-          </a:p>
-        </p:txBody>
-      </p:sp>
-      <p:sp>
-        <p:nvSpPr>
           <p:cNvPr id="3" name="Text 1"/>
           <p:cNvSpPr/>
           <p:nvPr/>
@@ -2399,7 +2272,7 @@
           <a:bodyPr wrap="square" rtlCol="0" anchor="ctr"/>
           <a:lstStyle/>
           <a:p>
-            <a:pPr indent="0" marL="0">
+            <a:pPr marL="0" indent="0">
               <a:buNone/>
             </a:pPr>
             <a:r>
@@ -2419,7 +2292,7 @@
       </p:sp>
       <p:graphicFrame>
         <p:nvGraphicFramePr>
-          <p:cNvPr id="4" name="Chart 0" descr=""/>
+          <p:cNvPr id="4" name="Chart 0"/>
           <p:cNvGraphicFramePr/>
           <p:nvPr/>
         </p:nvGraphicFramePr>
@@ -2427,9 +2300,9 @@
           <a:off x="640080" y="1554480"/>
           <a:ext cx="7772400" cy="4572000"/>
         </p:xfrm>
-        <a:graphic xmlns:a="http://schemas.openxmlformats.org/drawingml/2006/main">
+        <a:graphic>
           <a:graphicData uri="http://schemas.openxmlformats.org/drawingml/2006/chart">
-            <c:chart xmlns:c="http://schemas.openxmlformats.org/drawingml/2006/chart" r:id="rId1"/>
+            <c:chart xmlns:c="http://schemas.openxmlformats.org/drawingml/2006/chart" xmlns:r="http://schemas.openxmlformats.org/officeDocument/2006/relationships" r:id="rId3"/>
           </a:graphicData>
         </a:graphic>
       </p:graphicFrame>
@@ -2454,7 +2327,7 @@
           <a:bodyPr wrap="square" rtlCol="0" anchor="t"/>
           <a:lstStyle/>
           <a:p>
-            <a:pPr indent="0" marL="0">
+            <a:pPr marL="0" indent="0">
               <a:buNone/>
             </a:pPr>
             <a:r>
@@ -2472,6 +2345,36 @@
           </a:p>
         </p:txBody>
       </p:sp>
+      <p:pic>
+        <p:nvPicPr>
+          <p:cNvPr id="9" name="Picture 8">
+            <a:extLst>
+              <a:ext uri="{FF2B5EF4-FFF2-40B4-BE49-F238E27FC236}">
+                <a16:creationId xmlns:a16="http://schemas.microsoft.com/office/drawing/2014/main" id="{3FCC1A2E-BC5D-49D3-CE12-4392E710CEEA}"/>
+              </a:ext>
+            </a:extLst>
+          </p:cNvPr>
+          <p:cNvPicPr>
+            <a:picLocks noChangeAspect="1"/>
+          </p:cNvPicPr>
+          <p:nvPr/>
+        </p:nvPicPr>
+        <p:blipFill>
+          <a:blip r:embed="rId4"/>
+          <a:stretch>
+            <a:fillRect/>
+          </a:stretch>
+        </p:blipFill>
+        <p:spPr>
+          <a:xfrm>
+            <a:off x="640080" y="380425"/>
+            <a:ext cx="852096" cy="320040"/>
+          </a:xfrm>
+          <a:prstGeom prst="rect">
+            <a:avLst/>
+          </a:prstGeom>
+        </p:spPr>
+      </p:pic>
     </p:spTree>
   </p:cSld>
   <p:clrMapOvr>
@@ -2499,59 +2402,6 @@
       </p:grpSpPr>
       <p:sp>
         <p:nvSpPr>
-          <p:cNvPr id="2" name="Text 0"/>
-          <p:cNvSpPr/>
-          <p:nvPr/>
-        </p:nvSpPr>
-        <p:spPr>
-          <a:xfrm>
-            <a:off x="457200" y="320040"/>
-            <a:ext cx="1828800" cy="320040"/>
-          </a:xfrm>
-          <a:prstGeom prst="rect">
-            <a:avLst/>
-          </a:prstGeom>
-          <a:noFill/>
-          <a:ln/>
-        </p:spPr>
-        <p:txBody>
-          <a:bodyPr wrap="square" rtlCol="0" anchor="ctr"/>
-          <a:lstStyle/>
-          <a:p>
-            <a:pPr indent="0" marL="0">
-              <a:buNone/>
-            </a:pPr>
-            <a:r>
-              <a:rPr lang="en-US" sz="1400" b="1" dirty="0">
-                <a:solidFill>
-                  <a:srgbClr val="FF4D1C"/>
-                </a:solidFill>
-                <a:latin typeface="Space Grotesk" pitchFamily="34" charset="0"/>
-                <a:ea typeface="Space Grotesk" pitchFamily="34" charset="-122"/>
-                <a:cs typeface="Space Grotesk" pitchFamily="34" charset="-120"/>
-              </a:rPr>
-              <a:t>a</a:t>
-            </a:r>
-            <a:pPr indent="0" marL="0">
-              <a:buNone/>
-            </a:pPr>
-            <a:r>
-              <a:rPr lang="en-US" sz="1400" b="1" dirty="0">
-                <a:solidFill>
-                  <a:srgbClr val="3B3EA9"/>
-                </a:solidFill>
-                <a:latin typeface="Space Grotesk" pitchFamily="34" charset="0"/>
-                <a:ea typeface="Space Grotesk" pitchFamily="34" charset="-122"/>
-                <a:cs typeface="Space Grotesk" pitchFamily="34" charset="-120"/>
-              </a:rPr>
-              <a:t>riviti</a:t>
-            </a:r>
-            <a:endParaRPr lang="en-US" sz="1400" dirty="0"/>
-          </a:p>
-        </p:txBody>
-      </p:sp>
-      <p:sp>
-        <p:nvSpPr>
           <p:cNvPr id="3" name="Text 1"/>
           <p:cNvSpPr/>
           <p:nvPr/>
@@ -2571,7 +2421,7 @@
           <a:bodyPr wrap="square" rtlCol="0" anchor="ctr"/>
           <a:lstStyle/>
           <a:p>
-            <a:pPr indent="0" marL="0">
+            <a:pPr marL="0" indent="0">
               <a:buNone/>
             </a:pPr>
             <a:r>
@@ -2591,7 +2441,7 @@
       </p:sp>
       <p:graphicFrame>
         <p:nvGraphicFramePr>
-          <p:cNvPr id="4" name="Chart 0" descr=""/>
+          <p:cNvPr id="4" name="Chart 0"/>
           <p:cNvGraphicFramePr/>
           <p:nvPr/>
         </p:nvGraphicFramePr>
@@ -2599,9 +2449,9 @@
           <a:off x="640080" y="1554480"/>
           <a:ext cx="7772400" cy="4572000"/>
         </p:xfrm>
-        <a:graphic xmlns:a="http://schemas.openxmlformats.org/drawingml/2006/main">
+        <a:graphic>
           <a:graphicData uri="http://schemas.openxmlformats.org/drawingml/2006/chart">
-            <c:chart xmlns:c="http://schemas.openxmlformats.org/drawingml/2006/chart" r:id="rId1"/>
+            <c:chart xmlns:c="http://schemas.openxmlformats.org/drawingml/2006/chart" xmlns:r="http://schemas.openxmlformats.org/officeDocument/2006/relationships" r:id="rId3"/>
           </a:graphicData>
         </a:graphic>
       </p:graphicFrame>
@@ -2626,7 +2476,7 @@
           <a:bodyPr wrap="square" rtlCol="0" anchor="t"/>
           <a:lstStyle/>
           <a:p>
-            <a:pPr indent="0" marL="0">
+            <a:pPr marL="0" indent="0">
               <a:buNone/>
             </a:pPr>
             <a:r>
@@ -2644,6 +2494,36 @@
           </a:p>
         </p:txBody>
       </p:sp>
+      <p:pic>
+        <p:nvPicPr>
+          <p:cNvPr id="7" name="Picture 6">
+            <a:extLst>
+              <a:ext uri="{FF2B5EF4-FFF2-40B4-BE49-F238E27FC236}">
+                <a16:creationId xmlns:a16="http://schemas.microsoft.com/office/drawing/2014/main" id="{90342AE6-1BDE-DA88-BF41-D8BF598109D9}"/>
+              </a:ext>
+            </a:extLst>
+          </p:cNvPr>
+          <p:cNvPicPr>
+            <a:picLocks noChangeAspect="1"/>
+          </p:cNvPicPr>
+          <p:nvPr/>
+        </p:nvPicPr>
+        <p:blipFill>
+          <a:blip r:embed="rId4"/>
+          <a:stretch>
+            <a:fillRect/>
+          </a:stretch>
+        </p:blipFill>
+        <p:spPr>
+          <a:xfrm>
+            <a:off x="640080" y="380425"/>
+            <a:ext cx="852096" cy="320040"/>
+          </a:xfrm>
+          <a:prstGeom prst="rect">
+            <a:avLst/>
+          </a:prstGeom>
+        </p:spPr>
+      </p:pic>
     </p:spTree>
   </p:cSld>
   <p:clrMapOvr>
@@ -2671,59 +2551,6 @@
       </p:grpSpPr>
       <p:sp>
         <p:nvSpPr>
-          <p:cNvPr id="2" name="Text 0"/>
-          <p:cNvSpPr/>
-          <p:nvPr/>
-        </p:nvSpPr>
-        <p:spPr>
-          <a:xfrm>
-            <a:off x="457200" y="320040"/>
-            <a:ext cx="1828800" cy="320040"/>
-          </a:xfrm>
-          <a:prstGeom prst="rect">
-            <a:avLst/>
-          </a:prstGeom>
-          <a:noFill/>
-          <a:ln/>
-        </p:spPr>
-        <p:txBody>
-          <a:bodyPr wrap="square" rtlCol="0" anchor="ctr"/>
-          <a:lstStyle/>
-          <a:p>
-            <a:pPr indent="0" marL="0">
-              <a:buNone/>
-            </a:pPr>
-            <a:r>
-              <a:rPr lang="en-US" sz="1400" b="1" dirty="0">
-                <a:solidFill>
-                  <a:srgbClr val="FF4D1C"/>
-                </a:solidFill>
-                <a:latin typeface="Space Grotesk" pitchFamily="34" charset="0"/>
-                <a:ea typeface="Space Grotesk" pitchFamily="34" charset="-122"/>
-                <a:cs typeface="Space Grotesk" pitchFamily="34" charset="-120"/>
-              </a:rPr>
-              <a:t>a</a:t>
-            </a:r>
-            <a:pPr indent="0" marL="0">
-              <a:buNone/>
-            </a:pPr>
-            <a:r>
-              <a:rPr lang="en-US" sz="1400" b="1" dirty="0">
-                <a:solidFill>
-                  <a:srgbClr val="3B3EA9"/>
-                </a:solidFill>
-                <a:latin typeface="Space Grotesk" pitchFamily="34" charset="0"/>
-                <a:ea typeface="Space Grotesk" pitchFamily="34" charset="-122"/>
-                <a:cs typeface="Space Grotesk" pitchFamily="34" charset="-120"/>
-              </a:rPr>
-              <a:t>riviti</a:t>
-            </a:r>
-            <a:endParaRPr lang="en-US" sz="1400" dirty="0"/>
-          </a:p>
-        </p:txBody>
-      </p:sp>
-      <p:sp>
-        <p:nvSpPr>
           <p:cNvPr id="3" name="Text 1"/>
           <p:cNvSpPr/>
           <p:nvPr/>
@@ -2743,7 +2570,7 @@
           <a:bodyPr wrap="square" rtlCol="0" anchor="ctr"/>
           <a:lstStyle/>
           <a:p>
-            <a:pPr indent="0" marL="0">
+            <a:pPr marL="0" indent="0">
               <a:buNone/>
             </a:pPr>
             <a:r>
@@ -2763,7 +2590,7 @@
       </p:sp>
       <p:graphicFrame>
         <p:nvGraphicFramePr>
-          <p:cNvPr id="4" name="Chart 0" descr=""/>
+          <p:cNvPr id="4" name="Chart 0"/>
           <p:cNvGraphicFramePr/>
           <p:nvPr/>
         </p:nvGraphicFramePr>
@@ -2771,9 +2598,9 @@
           <a:off x="1188720" y="1554480"/>
           <a:ext cx="5943600" cy="4572000"/>
         </p:xfrm>
-        <a:graphic xmlns:a="http://schemas.openxmlformats.org/drawingml/2006/main">
+        <a:graphic>
           <a:graphicData uri="http://schemas.openxmlformats.org/drawingml/2006/chart">
-            <c:chart xmlns:c="http://schemas.openxmlformats.org/drawingml/2006/chart" r:id="rId1"/>
+            <c:chart xmlns:c="http://schemas.openxmlformats.org/drawingml/2006/chart" xmlns:r="http://schemas.openxmlformats.org/officeDocument/2006/relationships" r:id="rId3"/>
           </a:graphicData>
         </a:graphic>
       </p:graphicFrame>
@@ -2798,7 +2625,7 @@
           <a:bodyPr wrap="square" rtlCol="0" anchor="t"/>
           <a:lstStyle/>
           <a:p>
-            <a:pPr indent="0" marL="0">
+            <a:pPr marL="0" indent="0">
               <a:buNone/>
             </a:pPr>
             <a:r>
@@ -2816,6 +2643,36 @@
           </a:p>
         </p:txBody>
       </p:sp>
+      <p:pic>
+        <p:nvPicPr>
+          <p:cNvPr id="7" name="Picture 6">
+            <a:extLst>
+              <a:ext uri="{FF2B5EF4-FFF2-40B4-BE49-F238E27FC236}">
+                <a16:creationId xmlns:a16="http://schemas.microsoft.com/office/drawing/2014/main" id="{0335D21E-AEF1-744A-CEB7-5518FF868DA2}"/>
+              </a:ext>
+            </a:extLst>
+          </p:cNvPr>
+          <p:cNvPicPr>
+            <a:picLocks noChangeAspect="1"/>
+          </p:cNvPicPr>
+          <p:nvPr/>
+        </p:nvPicPr>
+        <p:blipFill>
+          <a:blip r:embed="rId4"/>
+          <a:stretch>
+            <a:fillRect/>
+          </a:stretch>
+        </p:blipFill>
+        <p:spPr>
+          <a:xfrm>
+            <a:off x="640080" y="380425"/>
+            <a:ext cx="852096" cy="320040"/>
+          </a:xfrm>
+          <a:prstGeom prst="rect">
+            <a:avLst/>
+          </a:prstGeom>
+        </p:spPr>
+      </p:pic>
     </p:spTree>
   </p:cSld>
   <p:clrMapOvr>
@@ -2843,59 +2700,6 @@
       </p:grpSpPr>
       <p:sp>
         <p:nvSpPr>
-          <p:cNvPr id="2" name="Text 0"/>
-          <p:cNvSpPr/>
-          <p:nvPr/>
-        </p:nvSpPr>
-        <p:spPr>
-          <a:xfrm>
-            <a:off x="457200" y="320040"/>
-            <a:ext cx="1828800" cy="320040"/>
-          </a:xfrm>
-          <a:prstGeom prst="rect">
-            <a:avLst/>
-          </a:prstGeom>
-          <a:noFill/>
-          <a:ln/>
-        </p:spPr>
-        <p:txBody>
-          <a:bodyPr wrap="square" rtlCol="0" anchor="ctr"/>
-          <a:lstStyle/>
-          <a:p>
-            <a:pPr indent="0" marL="0">
-              <a:buNone/>
-            </a:pPr>
-            <a:r>
-              <a:rPr lang="en-US" sz="1400" b="1" dirty="0">
-                <a:solidFill>
-                  <a:srgbClr val="FF4D1C"/>
-                </a:solidFill>
-                <a:latin typeface="Space Grotesk" pitchFamily="34" charset="0"/>
-                <a:ea typeface="Space Grotesk" pitchFamily="34" charset="-122"/>
-                <a:cs typeface="Space Grotesk" pitchFamily="34" charset="-120"/>
-              </a:rPr>
-              <a:t>a</a:t>
-            </a:r>
-            <a:pPr indent="0" marL="0">
-              <a:buNone/>
-            </a:pPr>
-            <a:r>
-              <a:rPr lang="en-US" sz="1400" b="1" dirty="0">
-                <a:solidFill>
-                  <a:srgbClr val="3B3EA9"/>
-                </a:solidFill>
-                <a:latin typeface="Space Grotesk" pitchFamily="34" charset="0"/>
-                <a:ea typeface="Space Grotesk" pitchFamily="34" charset="-122"/>
-                <a:cs typeface="Space Grotesk" pitchFamily="34" charset="-120"/>
-              </a:rPr>
-              <a:t>riviti</a:t>
-            </a:r>
-            <a:endParaRPr lang="en-US" sz="1400" dirty="0"/>
-          </a:p>
-        </p:txBody>
-      </p:sp>
-      <p:sp>
-        <p:nvSpPr>
           <p:cNvPr id="3" name="Text 1"/>
           <p:cNvSpPr/>
           <p:nvPr/>
@@ -2915,7 +2719,7 @@
           <a:bodyPr wrap="square" rtlCol="0" anchor="ctr"/>
           <a:lstStyle/>
           <a:p>
-            <a:pPr indent="0" marL="0">
+            <a:pPr marL="0" indent="0">
               <a:buNone/>
             </a:pPr>
             <a:r>
@@ -2935,7 +2739,7 @@
       </p:sp>
       <p:graphicFrame>
         <p:nvGraphicFramePr>
-          <p:cNvPr id="4" name="Chart 0" descr=""/>
+          <p:cNvPr id="4" name="Chart 0"/>
           <p:cNvGraphicFramePr/>
           <p:nvPr/>
         </p:nvGraphicFramePr>
@@ -2943,9 +2747,9 @@
           <a:off x="640080" y="1554480"/>
           <a:ext cx="7772400" cy="4572000"/>
         </p:xfrm>
-        <a:graphic xmlns:a="http://schemas.openxmlformats.org/drawingml/2006/main">
+        <a:graphic>
           <a:graphicData uri="http://schemas.openxmlformats.org/drawingml/2006/chart">
-            <c:chart xmlns:c="http://schemas.openxmlformats.org/drawingml/2006/chart" r:id="rId1"/>
+            <c:chart xmlns:c="http://schemas.openxmlformats.org/drawingml/2006/chart" xmlns:r="http://schemas.openxmlformats.org/officeDocument/2006/relationships" r:id="rId3"/>
           </a:graphicData>
         </a:graphic>
       </p:graphicFrame>
@@ -2970,7 +2774,7 @@
           <a:bodyPr wrap="square" rtlCol="0" anchor="t"/>
           <a:lstStyle/>
           <a:p>
-            <a:pPr indent="0" marL="0">
+            <a:pPr marL="0" indent="0">
               <a:buNone/>
             </a:pPr>
             <a:r>
@@ -2988,6 +2792,36 @@
           </a:p>
         </p:txBody>
       </p:sp>
+      <p:pic>
+        <p:nvPicPr>
+          <p:cNvPr id="9" name="Picture 8">
+            <a:extLst>
+              <a:ext uri="{FF2B5EF4-FFF2-40B4-BE49-F238E27FC236}">
+                <a16:creationId xmlns:a16="http://schemas.microsoft.com/office/drawing/2014/main" id="{849DA02F-5767-E3F9-2C1D-10FF2455C2EF}"/>
+              </a:ext>
+            </a:extLst>
+          </p:cNvPr>
+          <p:cNvPicPr>
+            <a:picLocks noChangeAspect="1"/>
+          </p:cNvPicPr>
+          <p:nvPr/>
+        </p:nvPicPr>
+        <p:blipFill>
+          <a:blip r:embed="rId4"/>
+          <a:stretch>
+            <a:fillRect/>
+          </a:stretch>
+        </p:blipFill>
+        <p:spPr>
+          <a:xfrm>
+            <a:off x="640080" y="380425"/>
+            <a:ext cx="852096" cy="320040"/>
+          </a:xfrm>
+          <a:prstGeom prst="rect">
+            <a:avLst/>
+          </a:prstGeom>
+        </p:spPr>
+      </p:pic>
     </p:spTree>
   </p:cSld>
   <p:clrMapOvr>
@@ -3289,4 +3123,319 @@
     </a:ext>
   </a:extLst>
 </a:theme>
+</file>
+
+<file path=ppt/theme/theme2.xml><?xml version="1.0" encoding="utf-8"?>
+<a:theme xmlns:a="http://schemas.openxmlformats.org/drawingml/2006/main" name="Office Theme">
+  <a:themeElements>
+    <a:clrScheme name="Office">
+      <a:dk1>
+        <a:sysClr val="windowText" lastClr="000000"/>
+      </a:dk1>
+      <a:lt1>
+        <a:sysClr val="window" lastClr="FFFFFF"/>
+      </a:lt1>
+      <a:dk2>
+        <a:srgbClr val="0E2841"/>
+      </a:dk2>
+      <a:lt2>
+        <a:srgbClr val="E8E8E8"/>
+      </a:lt2>
+      <a:accent1>
+        <a:srgbClr val="156082"/>
+      </a:accent1>
+      <a:accent2>
+        <a:srgbClr val="E97132"/>
+      </a:accent2>
+      <a:accent3>
+        <a:srgbClr val="196B24"/>
+      </a:accent3>
+      <a:accent4>
+        <a:srgbClr val="0F9ED5"/>
+      </a:accent4>
+      <a:accent5>
+        <a:srgbClr val="A02B93"/>
+      </a:accent5>
+      <a:accent6>
+        <a:srgbClr val="4EA72E"/>
+      </a:accent6>
+      <a:hlink>
+        <a:srgbClr val="467886"/>
+      </a:hlink>
+      <a:folHlink>
+        <a:srgbClr val="96607D"/>
+      </a:folHlink>
+    </a:clrScheme>
+    <a:fontScheme name="Office">
+      <a:majorFont>
+        <a:latin typeface="Aptos Display" panose="02110004020202020204"/>
+        <a:ea typeface=""/>
+        <a:cs typeface=""/>
+        <a:font script="Jpan" typeface="游ゴシック Light"/>
+        <a:font script="Hang" typeface="맑은 고딕"/>
+        <a:font script="Hans" typeface="等线 Light"/>
+        <a:font script="Hant" typeface="新細明體"/>
+        <a:font script="Arab" typeface="Times New Roman"/>
+        <a:font script="Hebr" typeface="Times New Roman"/>
+        <a:font script="Thai" typeface="Angsana New"/>
+        <a:font script="Ethi" typeface="Nyala"/>
+        <a:font script="Beng" typeface="Vrinda"/>
+        <a:font script="Gujr" typeface="Shruti"/>
+        <a:font script="Khmr" typeface="MoolBoran"/>
+        <a:font script="Knda" typeface="Tunga"/>
+        <a:font script="Guru" typeface="Raavi"/>
+        <a:font script="Cans" typeface="Euphemia"/>
+        <a:font script="Cher" typeface="Plantagenet Cherokee"/>
+        <a:font script="Yiii" typeface="Microsoft Yi Baiti"/>
+        <a:font script="Tibt" typeface="Microsoft Himalaya"/>
+        <a:font script="Thaa" typeface="MV Boli"/>
+        <a:font script="Deva" typeface="Mangal"/>
+        <a:font script="Telu" typeface="Gautami"/>
+        <a:font script="Taml" typeface="Latha"/>
+        <a:font script="Syrc" typeface="Estrangelo Edessa"/>
+        <a:font script="Orya" typeface="Kalinga"/>
+        <a:font script="Mlym" typeface="Kartika"/>
+        <a:font script="Laoo" typeface="DokChampa"/>
+        <a:font script="Sinh" typeface="Iskoola Pota"/>
+        <a:font script="Mong" typeface="Mongolian Baiti"/>
+        <a:font script="Viet" typeface="Times New Roman"/>
+        <a:font script="Uigh" typeface="Microsoft Uighur"/>
+        <a:font script="Geor" typeface="Sylfaen"/>
+        <a:font script="Armn" typeface="Arial"/>
+        <a:font script="Bugi" typeface="Leelawadee UI"/>
+        <a:font script="Bopo" typeface="Microsoft JhengHei"/>
+        <a:font script="Java" typeface="Javanese Text"/>
+        <a:font script="Lisu" typeface="Segoe UI"/>
+        <a:font script="Mymr" typeface="Myanmar Text"/>
+        <a:font script="Nkoo" typeface="Ebrima"/>
+        <a:font script="Olck" typeface="Nirmala UI"/>
+        <a:font script="Osma" typeface="Ebrima"/>
+        <a:font script="Phag" typeface="Phagspa"/>
+        <a:font script="Syrn" typeface="Estrangelo Edessa"/>
+        <a:font script="Syrj" typeface="Estrangelo Edessa"/>
+        <a:font script="Syre" typeface="Estrangelo Edessa"/>
+        <a:font script="Sora" typeface="Nirmala UI"/>
+        <a:font script="Tale" typeface="Microsoft Tai Le"/>
+        <a:font script="Talu" typeface="Microsoft New Tai Lue"/>
+        <a:font script="Tfng" typeface="Ebrima"/>
+      </a:majorFont>
+      <a:minorFont>
+        <a:latin typeface="Aptos" panose="02110004020202020204"/>
+        <a:ea typeface=""/>
+        <a:cs typeface=""/>
+        <a:font script="Jpan" typeface="游ゴシック"/>
+        <a:font script="Hang" typeface="맑은 고딕"/>
+        <a:font script="Hans" typeface="等线"/>
+        <a:font script="Hant" typeface="新細明體"/>
+        <a:font script="Arab" typeface="Arial"/>
+        <a:font script="Hebr" typeface="Arial"/>
+        <a:font script="Thai" typeface="Cordia New"/>
+        <a:font script="Ethi" typeface="Nyala"/>
+        <a:font script="Beng" typeface="Vrinda"/>
+        <a:font script="Gujr" typeface="Shruti"/>
+        <a:font script="Khmr" typeface="DaunPenh"/>
+        <a:font script="Knda" typeface="Tunga"/>
+        <a:font script="Guru" typeface="Raavi"/>
+        <a:font script="Cans" typeface="Euphemia"/>
+        <a:font script="Cher" typeface="Plantagenet Cherokee"/>
+        <a:font script="Yiii" typeface="Microsoft Yi Baiti"/>
+        <a:font script="Tibt" typeface="Microsoft Himalaya"/>
+        <a:font script="Thaa" typeface="MV Boli"/>
+        <a:font script="Deva" typeface="Mangal"/>
+        <a:font script="Telu" typeface="Gautami"/>
+        <a:font script="Taml" typeface="Latha"/>
+        <a:font script="Syrc" typeface="Estrangelo Edessa"/>
+        <a:font script="Orya" typeface="Kalinga"/>
+        <a:font script="Mlym" typeface="Kartika"/>
+        <a:font script="Laoo" typeface="DokChampa"/>
+        <a:font script="Sinh" typeface="Iskoola Pota"/>
+        <a:font script="Mong" typeface="Mongolian Baiti"/>
+        <a:font script="Viet" typeface="Arial"/>
+        <a:font script="Uigh" typeface="Microsoft Uighur"/>
+        <a:font script="Geor" typeface="Sylfaen"/>
+        <a:font script="Armn" typeface="Arial"/>
+        <a:font script="Bugi" typeface="Leelawadee UI"/>
+        <a:font script="Bopo" typeface="Microsoft JhengHei"/>
+        <a:font script="Java" typeface="Javanese Text"/>
+        <a:font script="Lisu" typeface="Segoe UI"/>
+        <a:font script="Mymr" typeface="Myanmar Text"/>
+        <a:font script="Nkoo" typeface="Ebrima"/>
+        <a:font script="Olck" typeface="Nirmala UI"/>
+        <a:font script="Osma" typeface="Ebrima"/>
+        <a:font script="Phag" typeface="Phagspa"/>
+        <a:font script="Syrn" typeface="Estrangelo Edessa"/>
+        <a:font script="Syrj" typeface="Estrangelo Edessa"/>
+        <a:font script="Syre" typeface="Estrangelo Edessa"/>
+        <a:font script="Sora" typeface="Nirmala UI"/>
+        <a:font script="Tale" typeface="Microsoft Tai Le"/>
+        <a:font script="Talu" typeface="Microsoft New Tai Lue"/>
+        <a:font script="Tfng" typeface="Ebrima"/>
+      </a:minorFont>
+    </a:fontScheme>
+    <a:fmtScheme name="Office">
+      <a:fillStyleLst>
+        <a:solidFill>
+          <a:schemeClr val="phClr"/>
+        </a:solidFill>
+        <a:gradFill rotWithShape="1">
+          <a:gsLst>
+            <a:gs pos="0">
+              <a:schemeClr val="phClr">
+                <a:lumMod val="110000"/>
+                <a:satMod val="105000"/>
+                <a:tint val="67000"/>
+              </a:schemeClr>
+            </a:gs>
+            <a:gs pos="50000">
+              <a:schemeClr val="phClr">
+                <a:lumMod val="105000"/>
+                <a:satMod val="103000"/>
+                <a:tint val="73000"/>
+              </a:schemeClr>
+            </a:gs>
+            <a:gs pos="100000">
+              <a:schemeClr val="phClr">
+                <a:lumMod val="105000"/>
+                <a:satMod val="109000"/>
+                <a:tint val="81000"/>
+              </a:schemeClr>
+            </a:gs>
+          </a:gsLst>
+          <a:lin ang="5400000" scaled="0"/>
+        </a:gradFill>
+        <a:gradFill rotWithShape="1">
+          <a:gsLst>
+            <a:gs pos="0">
+              <a:schemeClr val="phClr">
+                <a:satMod val="103000"/>
+                <a:lumMod val="102000"/>
+                <a:tint val="94000"/>
+              </a:schemeClr>
+            </a:gs>
+            <a:gs pos="50000">
+              <a:schemeClr val="phClr">
+                <a:satMod val="110000"/>
+                <a:lumMod val="100000"/>
+                <a:shade val="100000"/>
+              </a:schemeClr>
+            </a:gs>
+            <a:gs pos="100000">
+              <a:schemeClr val="phClr">
+                <a:lumMod val="99000"/>
+                <a:satMod val="120000"/>
+                <a:shade val="78000"/>
+              </a:schemeClr>
+            </a:gs>
+          </a:gsLst>
+          <a:lin ang="5400000" scaled="0"/>
+        </a:gradFill>
+      </a:fillStyleLst>
+      <a:lnStyleLst>
+        <a:ln w="12700" cap="flat" cmpd="sng" algn="ctr">
+          <a:solidFill>
+            <a:schemeClr val="phClr"/>
+          </a:solidFill>
+          <a:prstDash val="solid"/>
+          <a:miter lim="800000"/>
+        </a:ln>
+        <a:ln w="19050" cap="flat" cmpd="sng" algn="ctr">
+          <a:solidFill>
+            <a:schemeClr val="phClr"/>
+          </a:solidFill>
+          <a:prstDash val="solid"/>
+          <a:miter lim="800000"/>
+        </a:ln>
+        <a:ln w="25400" cap="flat" cmpd="sng" algn="ctr">
+          <a:solidFill>
+            <a:schemeClr val="phClr"/>
+          </a:solidFill>
+          <a:prstDash val="solid"/>
+          <a:miter lim="800000"/>
+        </a:ln>
+      </a:lnStyleLst>
+      <a:effectStyleLst>
+        <a:effectStyle>
+          <a:effectLst/>
+        </a:effectStyle>
+        <a:effectStyle>
+          <a:effectLst/>
+        </a:effectStyle>
+        <a:effectStyle>
+          <a:effectLst>
+            <a:outerShdw blurRad="57150" dist="19050" dir="5400000" algn="ctr" rotWithShape="0">
+              <a:srgbClr val="000000">
+                <a:alpha val="63000"/>
+              </a:srgbClr>
+            </a:outerShdw>
+          </a:effectLst>
+        </a:effectStyle>
+      </a:effectStyleLst>
+      <a:bgFillStyleLst>
+        <a:solidFill>
+          <a:schemeClr val="phClr"/>
+        </a:solidFill>
+        <a:solidFill>
+          <a:schemeClr val="phClr">
+            <a:tint val="95000"/>
+            <a:satMod val="170000"/>
+          </a:schemeClr>
+        </a:solidFill>
+        <a:gradFill rotWithShape="1">
+          <a:gsLst>
+            <a:gs pos="0">
+              <a:schemeClr val="phClr">
+                <a:tint val="93000"/>
+                <a:satMod val="150000"/>
+                <a:shade val="98000"/>
+                <a:lumMod val="102000"/>
+              </a:schemeClr>
+            </a:gs>
+            <a:gs pos="50000">
+              <a:schemeClr val="phClr">
+                <a:tint val="98000"/>
+                <a:satMod val="130000"/>
+                <a:shade val="90000"/>
+                <a:lumMod val="103000"/>
+              </a:schemeClr>
+            </a:gs>
+            <a:gs pos="100000">
+              <a:schemeClr val="phClr">
+                <a:shade val="63000"/>
+                <a:satMod val="120000"/>
+              </a:schemeClr>
+            </a:gs>
+          </a:gsLst>
+          <a:lin ang="5400000" scaled="0"/>
+        </a:gradFill>
+      </a:bgFillStyleLst>
+    </a:fmtScheme>
+  </a:themeElements>
+  <a:objectDefaults>
+    <a:lnDef>
+      <a:spPr/>
+      <a:bodyPr/>
+      <a:lstStyle/>
+      <a:style>
+        <a:lnRef idx="2">
+          <a:schemeClr val="accent1"/>
+        </a:lnRef>
+        <a:fillRef idx="0">
+          <a:schemeClr val="accent1"/>
+        </a:fillRef>
+        <a:effectRef idx="1">
+          <a:schemeClr val="accent1"/>
+        </a:effectRef>
+        <a:fontRef idx="minor">
+          <a:schemeClr val="tx1"/>
+        </a:fontRef>
+      </a:style>
+    </a:lnDef>
+  </a:objectDefaults>
+  <a:extraClrSchemeLst/>
+  <a:extLst>
+    <a:ext uri="{05A4C25C-085E-4340-85A3-A5531E510DB2}">
+      <thm15:themeFamily xmlns:thm15="http://schemas.microsoft.com/office/thememl/2012/main" name="Office Theme" id="{2E142A2C-CD16-42D6-873A-C26D2A0506FA}" vid="{1BDDFF52-6CD6-40A5-AB3C-68EB2F1E4D0A}"/>
+    </a:ext>
+  </a:extLst>
+</a:theme>
 </file>